--- a/第二次/AI4CHEM-2.pptx
+++ b/第二次/AI4CHEM-2.pptx
@@ -4551,7 +4551,7 @@
             </a:r>
             <a:r>
               <a:rPr lang="zh-CN" altLang="en-US" sz="3200" dirty="0"/>
-              <a:t>具身智能</a:t>
+              <a:t>机器智能</a:t>
             </a:r>
           </a:p>
         </p:txBody>
